--- a/Heteroskedasticity.ptx.pptx
+++ b/Heteroskedasticity.ptx.pptx
@@ -139,7 +139,7 @@
   <pc:docChgLst>
     <pc:chgData name="Daryanto, Ahmad" userId="61940c2a-8427-4576-9f17-0c8fab086415" providerId="ADAL" clId="{7843BEE4-BB9E-47EA-A812-8FBB036213D7}"/>
     <pc:docChg chg="undo custSel addSld delSld modSld sldOrd">
-      <pc:chgData name="Daryanto, Ahmad" userId="61940c2a-8427-4576-9f17-0c8fab086415" providerId="ADAL" clId="{7843BEE4-BB9E-47EA-A812-8FBB036213D7}" dt="2026-09-07T02:48:40.128" v="581" actId="20577"/>
+      <pc:chgData name="Daryanto, Ahmad" userId="61940c2a-8427-4576-9f17-0c8fab086415" providerId="ADAL" clId="{7843BEE4-BB9E-47EA-A812-8FBB036213D7}" dt="2026-09-09T02:44:08.468" v="584" actId="1076"/>
       <pc:docMkLst>
         <pc:docMk/>
       </pc:docMkLst>
@@ -149,14 +149,6 @@
           <pc:docMk/>
           <pc:sldMk cId="2087706263" sldId="275"/>
         </pc:sldMkLst>
-        <pc:spChg chg="add del mod">
-          <ac:chgData name="Daryanto, Ahmad" userId="61940c2a-8427-4576-9f17-0c8fab086415" providerId="ADAL" clId="{7843BEE4-BB9E-47EA-A812-8FBB036213D7}" dt="2026-09-07T02:43:57.146" v="268" actId="478"/>
-          <ac:spMkLst>
-            <pc:docMk/>
-            <pc:sldMk cId="2087706263" sldId="275"/>
-            <ac:spMk id="7" creationId="{0DB4F1D9-6AE2-1A69-CB59-DA51D30ADCAE}"/>
-          </ac:spMkLst>
-        </pc:spChg>
       </pc:sldChg>
       <pc:sldChg chg="modSp add mod">
         <pc:chgData name="Daryanto, Ahmad" userId="61940c2a-8427-4576-9f17-0c8fab086415" providerId="ADAL" clId="{7843BEE4-BB9E-47EA-A812-8FBB036213D7}" dt="2026-09-03T01:58:42.081" v="214" actId="6549"/>
@@ -243,8 +235,8 @@
           </ac:spMkLst>
         </pc:spChg>
       </pc:sldChg>
-      <pc:sldChg chg="addSp modSp new mod">
-        <pc:chgData name="Daryanto, Ahmad" userId="61940c2a-8427-4576-9f17-0c8fab086415" providerId="ADAL" clId="{7843BEE4-BB9E-47EA-A812-8FBB036213D7}" dt="2026-09-07T02:45:03.439" v="341" actId="20577"/>
+      <pc:sldChg chg="addSp delSp modSp new mod">
+        <pc:chgData name="Daryanto, Ahmad" userId="61940c2a-8427-4576-9f17-0c8fab086415" providerId="ADAL" clId="{7843BEE4-BB9E-47EA-A812-8FBB036213D7}" dt="2026-09-09T02:44:08.468" v="584" actId="1076"/>
         <pc:sldMkLst>
           <pc:docMk/>
           <pc:sldMk cId="2718271772" sldId="465"/>
@@ -265,12 +257,20 @@
             <ac:spMk id="3" creationId="{79B78040-2BB7-69A9-AEC4-1F5B9936AE8A}"/>
           </ac:spMkLst>
         </pc:spChg>
-        <pc:spChg chg="add mod">
-          <ac:chgData name="Daryanto, Ahmad" userId="61940c2a-8427-4576-9f17-0c8fab086415" providerId="ADAL" clId="{7843BEE4-BB9E-47EA-A812-8FBB036213D7}" dt="2026-09-07T02:43:48.249" v="267" actId="1076"/>
+        <pc:spChg chg="add del mod">
+          <ac:chgData name="Daryanto, Ahmad" userId="61940c2a-8427-4576-9f17-0c8fab086415" providerId="ADAL" clId="{7843BEE4-BB9E-47EA-A812-8FBB036213D7}" dt="2026-09-09T02:44:02.116" v="582" actId="478"/>
           <ac:spMkLst>
             <pc:docMk/>
             <pc:sldMk cId="2718271772" sldId="465"/>
             <ac:spMk id="5" creationId="{DBB4753E-11EA-790E-1D88-F2F8B69007AE}"/>
+          </ac:spMkLst>
+        </pc:spChg>
+        <pc:spChg chg="add mod">
+          <ac:chgData name="Daryanto, Ahmad" userId="61940c2a-8427-4576-9f17-0c8fab086415" providerId="ADAL" clId="{7843BEE4-BB9E-47EA-A812-8FBB036213D7}" dt="2026-09-09T02:44:08.468" v="584" actId="1076"/>
+          <ac:spMkLst>
+            <pc:docMk/>
+            <pc:sldMk cId="2718271772" sldId="465"/>
+            <ac:spMk id="6" creationId="{2E6FB601-BD24-C5E4-4B3E-4127FC16D403}"/>
           </ac:spMkLst>
         </pc:spChg>
       </pc:sldChg>
@@ -384,7 +384,7 @@
           <a:p>
             <a:fld id="{E2C4754F-49C3-9E4C-A10B-1C483A475066}" type="datetimeFigureOut">
               <a:rPr lang="en-GB" smtClean="0"/>
-              <a:t>07/09/2026</a:t>
+              <a:t>09/09/2026</a:t>
             </a:fld>
             <a:endParaRPr lang="en-GB"/>
           </a:p>
@@ -884,7 +884,7 @@
           <a:p>
             <a:fld id="{0AA943E6-AD7E-204A-A55D-4B76344E30EC}" type="datetimeFigureOut">
               <a:rPr lang="en-US" smtClean="0"/>
-              <a:t>9/7/2026</a:t>
+              <a:t>9/9/2026</a:t>
             </a:fld>
             <a:endParaRPr lang="en-US"/>
           </a:p>
@@ -1084,7 +1084,7 @@
           <a:p>
             <a:fld id="{0AA943E6-AD7E-204A-A55D-4B76344E30EC}" type="datetimeFigureOut">
               <a:rPr lang="en-US" smtClean="0"/>
-              <a:t>9/7/2026</a:t>
+              <a:t>9/9/2026</a:t>
             </a:fld>
             <a:endParaRPr lang="en-US"/>
           </a:p>
@@ -1294,7 +1294,7 @@
           <a:p>
             <a:fld id="{0AA943E6-AD7E-204A-A55D-4B76344E30EC}" type="datetimeFigureOut">
               <a:rPr lang="en-US" smtClean="0"/>
-              <a:t>9/7/2026</a:t>
+              <a:t>9/9/2026</a:t>
             </a:fld>
             <a:endParaRPr lang="en-US"/>
           </a:p>
@@ -1494,7 +1494,7 @@
           <a:p>
             <a:fld id="{0AA943E6-AD7E-204A-A55D-4B76344E30EC}" type="datetimeFigureOut">
               <a:rPr lang="en-US" smtClean="0"/>
-              <a:t>9/7/2026</a:t>
+              <a:t>9/9/2026</a:t>
             </a:fld>
             <a:endParaRPr lang="en-US"/>
           </a:p>
@@ -1770,7 +1770,7 @@
           <a:p>
             <a:fld id="{0AA943E6-AD7E-204A-A55D-4B76344E30EC}" type="datetimeFigureOut">
               <a:rPr lang="en-US" smtClean="0"/>
-              <a:t>9/7/2026</a:t>
+              <a:t>9/9/2026</a:t>
             </a:fld>
             <a:endParaRPr lang="en-US"/>
           </a:p>
@@ -2038,7 +2038,7 @@
           <a:p>
             <a:fld id="{0AA943E6-AD7E-204A-A55D-4B76344E30EC}" type="datetimeFigureOut">
               <a:rPr lang="en-US" smtClean="0"/>
-              <a:t>9/7/2026</a:t>
+              <a:t>9/9/2026</a:t>
             </a:fld>
             <a:endParaRPr lang="en-US"/>
           </a:p>
@@ -2453,7 +2453,7 @@
           <a:p>
             <a:fld id="{0AA943E6-AD7E-204A-A55D-4B76344E30EC}" type="datetimeFigureOut">
               <a:rPr lang="en-US" smtClean="0"/>
-              <a:t>9/7/2026</a:t>
+              <a:t>9/9/2026</a:t>
             </a:fld>
             <a:endParaRPr lang="en-US"/>
           </a:p>
@@ -2595,7 +2595,7 @@
           <a:p>
             <a:fld id="{0AA943E6-AD7E-204A-A55D-4B76344E30EC}" type="datetimeFigureOut">
               <a:rPr lang="en-US" smtClean="0"/>
-              <a:t>9/7/2026</a:t>
+              <a:t>9/9/2026</a:t>
             </a:fld>
             <a:endParaRPr lang="en-US"/>
           </a:p>
@@ -2708,7 +2708,7 @@
           <a:p>
             <a:fld id="{0AA943E6-AD7E-204A-A55D-4B76344E30EC}" type="datetimeFigureOut">
               <a:rPr lang="en-US" smtClean="0"/>
-              <a:t>9/7/2026</a:t>
+              <a:t>9/9/2026</a:t>
             </a:fld>
             <a:endParaRPr lang="en-US"/>
           </a:p>
@@ -3021,7 +3021,7 @@
           <a:p>
             <a:fld id="{0AA943E6-AD7E-204A-A55D-4B76344E30EC}" type="datetimeFigureOut">
               <a:rPr lang="en-US" smtClean="0"/>
-              <a:t>9/7/2026</a:t>
+              <a:t>9/9/2026</a:t>
             </a:fld>
             <a:endParaRPr lang="en-US"/>
           </a:p>
@@ -3310,7 +3310,7 @@
           <a:p>
             <a:fld id="{0AA943E6-AD7E-204A-A55D-4B76344E30EC}" type="datetimeFigureOut">
               <a:rPr lang="en-US" smtClean="0"/>
-              <a:t>9/7/2026</a:t>
+              <a:t>9/9/2026</a:t>
             </a:fld>
             <a:endParaRPr lang="en-US"/>
           </a:p>
@@ -3553,7 +3553,7 @@
           <a:p>
             <a:fld id="{0AA943E6-AD7E-204A-A55D-4B76344E30EC}" type="datetimeFigureOut">
               <a:rPr lang="en-US" smtClean="0"/>
-              <a:t>9/7/2026</a:t>
+              <a:t>9/9/2026</a:t>
             </a:fld>
             <a:endParaRPr lang="en-US"/>
           </a:p>
@@ -6646,10 +6646,10 @@
       </p:sp>
       <p:sp>
         <p:nvSpPr>
-          <p:cNvPr id="5" name="TextBox 4">
-            <a:extLst>
-              <a:ext uri="{FF2B5EF4-FFF2-40B4-BE49-F238E27FC236}">
-                <a16:creationId xmlns:a16="http://schemas.microsoft.com/office/drawing/2014/main" id="{DBB4753E-11EA-790E-1D88-F2F8B69007AE}"/>
+          <p:cNvPr id="6" name="TextBox 5">
+            <a:extLst>
+              <a:ext uri="{FF2B5EF4-FFF2-40B4-BE49-F238E27FC236}">
+                <a16:creationId xmlns:a16="http://schemas.microsoft.com/office/drawing/2014/main" id="{2E6FB601-BD24-C5E4-4B3E-4127FC16D403}"/>
               </a:ext>
             </a:extLst>
           </p:cNvPr>
@@ -6658,8 +6658,8 @@
         </p:nvSpPr>
         <p:spPr>
           <a:xfrm>
-            <a:off x="2122715" y="1825625"/>
-            <a:ext cx="6096000" cy="954107"/>
+            <a:off x="2438400" y="1825625"/>
+            <a:ext cx="6096000" cy="369332"/>
           </a:xfrm>
           <a:prstGeom prst="rect">
             <a:avLst/>
@@ -6673,15 +6673,12 @@
           <a:lstStyle/>
           <a:p>
             <a:r>
-              <a:rPr lang="en-GB" sz="2800" dirty="0">
+              <a:rPr lang="en-GB" dirty="0">
                 <a:hlinkClick r:id="rId2"/>
               </a:rPr>
-              <a:t>https://github.com/ahdar1/FIA</a:t>
-            </a:r>
-            <a:endParaRPr lang="en-GB" sz="2800" dirty="0"/>
-          </a:p>
-          <a:p>
-            <a:endParaRPr lang="en-GB" sz="2800" dirty="0"/>
+              <a:t>FIA Workshop Resources</a:t>
+            </a:r>
+            <a:endParaRPr lang="en-GB" dirty="0"/>
           </a:p>
         </p:txBody>
       </p:sp>

--- a/Heteroskedasticity.ptx.pptx
+++ b/Heteroskedasticity.ptx.pptx
@@ -139,7 +139,7 @@
   <pc:docChgLst>
     <pc:chgData name="Daryanto, Ahmad" userId="61940c2a-8427-4576-9f17-0c8fab086415" providerId="ADAL" clId="{7843BEE4-BB9E-47EA-A812-8FBB036213D7}"/>
     <pc:docChg chg="undo custSel addSld delSld modSld sldOrd">
-      <pc:chgData name="Daryanto, Ahmad" userId="61940c2a-8427-4576-9f17-0c8fab086415" providerId="ADAL" clId="{7843BEE4-BB9E-47EA-A812-8FBB036213D7}" dt="2026-09-09T02:44:08.468" v="584" actId="1076"/>
+      <pc:chgData name="Daryanto, Ahmad" userId="61940c2a-8427-4576-9f17-0c8fab086415" providerId="ADAL" clId="{7843BEE4-BB9E-47EA-A812-8FBB036213D7}" dt="2026-09-09T02:45:55.077" v="647" actId="6549"/>
       <pc:docMkLst>
         <pc:docMk/>
       </pc:docMkLst>
@@ -170,6 +170,21 @@
             <pc:docMk/>
             <pc:sldMk cId="3993109663" sldId="284"/>
             <ac:spMk id="4" creationId="{52A82FCD-3319-124D-1AFA-2E178C88A554}"/>
+          </ac:spMkLst>
+        </pc:spChg>
+      </pc:sldChg>
+      <pc:sldChg chg="modSp mod">
+        <pc:chgData name="Daryanto, Ahmad" userId="61940c2a-8427-4576-9f17-0c8fab086415" providerId="ADAL" clId="{7843BEE4-BB9E-47EA-A812-8FBB036213D7}" dt="2026-09-09T02:45:55.077" v="647" actId="6549"/>
+        <pc:sldMkLst>
+          <pc:docMk/>
+          <pc:sldMk cId="3777251816" sldId="440"/>
+        </pc:sldMkLst>
+        <pc:spChg chg="mod">
+          <ac:chgData name="Daryanto, Ahmad" userId="61940c2a-8427-4576-9f17-0c8fab086415" providerId="ADAL" clId="{7843BEE4-BB9E-47EA-A812-8FBB036213D7}" dt="2026-09-09T02:45:55.077" v="647" actId="6549"/>
+          <ac:spMkLst>
+            <pc:docMk/>
+            <pc:sldMk cId="3777251816" sldId="440"/>
+            <ac:spMk id="3" creationId="{DE896EA1-E9E2-3BA9-0750-B21DE6E542A9}"/>
           </ac:spMkLst>
         </pc:spChg>
       </pc:sldChg>
@@ -6789,24 +6804,9 @@
             </a:r>
           </a:p>
           <a:p>
-            <a:pPr>
-              <a:buFont typeface="Arial" panose="020B0604020202020204" pitchFamily="34" charset="0"/>
-              <a:buChar char="•"/>
-            </a:pPr>
-            <a:r>
-              <a:rPr lang="en-GB" dirty="0">
-                <a:effectLst/>
-              </a:rPr>
-              <a:t>Know how to detect a multicollinearity problem and remedy it.</a:t>
-            </a:r>
-          </a:p>
-          <a:p>
             <a:pPr marL="0" indent="0">
               <a:buNone/>
             </a:pPr>
-            <a:br>
-              <a:rPr lang="en-GB" dirty="0"/>
-            </a:br>
             <a:endParaRPr lang="en-GB" dirty="0"/>
           </a:p>
         </p:txBody>

--- a/Heteroskedasticity.ptx.pptx
+++ b/Heteroskedasticity.ptx.pptx
@@ -139,7 +139,7 @@
   <pc:docChgLst>
     <pc:chgData name="Daryanto, Ahmad" userId="61940c2a-8427-4576-9f17-0c8fab086415" providerId="ADAL" clId="{7843BEE4-BB9E-47EA-A812-8FBB036213D7}"/>
     <pc:docChg chg="undo custSel addSld delSld modSld sldOrd">
-      <pc:chgData name="Daryanto, Ahmad" userId="61940c2a-8427-4576-9f17-0c8fab086415" providerId="ADAL" clId="{7843BEE4-BB9E-47EA-A812-8FBB036213D7}" dt="2026-09-09T02:45:55.077" v="647" actId="6549"/>
+      <pc:chgData name="Daryanto, Ahmad" userId="61940c2a-8427-4576-9f17-0c8fab086415" providerId="ADAL" clId="{7843BEE4-BB9E-47EA-A812-8FBB036213D7}" dt="2026-09-09T03:27:22.789" v="651" actId="20577"/>
       <pc:docMkLst>
         <pc:docMk/>
       </pc:docMkLst>
@@ -185,6 +185,21 @@
             <pc:docMk/>
             <pc:sldMk cId="3777251816" sldId="440"/>
             <ac:spMk id="3" creationId="{DE896EA1-E9E2-3BA9-0750-B21DE6E542A9}"/>
+          </ac:spMkLst>
+        </pc:spChg>
+      </pc:sldChg>
+      <pc:sldChg chg="modSp mod">
+        <pc:chgData name="Daryanto, Ahmad" userId="61940c2a-8427-4576-9f17-0c8fab086415" providerId="ADAL" clId="{7843BEE4-BB9E-47EA-A812-8FBB036213D7}" dt="2026-09-09T03:27:22.789" v="651" actId="20577"/>
+        <pc:sldMkLst>
+          <pc:docMk/>
+          <pc:sldMk cId="3995459872" sldId="447"/>
+        </pc:sldMkLst>
+        <pc:spChg chg="mod">
+          <ac:chgData name="Daryanto, Ahmad" userId="61940c2a-8427-4576-9f17-0c8fab086415" providerId="ADAL" clId="{7843BEE4-BB9E-47EA-A812-8FBB036213D7}" dt="2026-09-09T03:27:22.789" v="651" actId="20577"/>
+          <ac:spMkLst>
+            <pc:docMk/>
+            <pc:sldMk cId="3995459872" sldId="447"/>
+            <ac:spMk id="6" creationId="{A46B258C-645E-2FA7-2857-60FC9DD85401}"/>
           </ac:spMkLst>
         </pc:spChg>
       </pc:sldChg>
@@ -4743,14 +4758,24 @@
               <a:buChar char="•"/>
             </a:pPr>
             <a:r>
-              <a:rPr lang="en-GB" b="0" i="0" u="none" strike="noStrike" dirty="0">
+              <a:rPr lang="en-GB" b="0" i="0" u="none" strike="noStrike">
                 <a:solidFill>
                   <a:srgbClr val="000000"/>
                 </a:solidFill>
                 <a:effectLst/>
                 <a:latin typeface="Source Sans Pro" panose="020B0503030403020204" pitchFamily="34" charset="0"/>
               </a:rPr>
-              <a:t>Insert Sales to the Outcome variable box.</a:t>
+              <a:t>Insert Sat </a:t>
+            </a:r>
+            <a:r>
+              <a:rPr lang="en-GB" b="0" i="0" u="none" strike="noStrike" dirty="0">
+                <a:solidFill>
+                  <a:srgbClr val="000000"/>
+                </a:solidFill>
+                <a:effectLst/>
+                <a:latin typeface="Source Sans Pro" panose="020B0503030403020204" pitchFamily="34" charset="0"/>
+              </a:rPr>
+              <a:t>to the Outcome variable box.</a:t>
             </a:r>
           </a:p>
           <a:p>
